--- a/output/education/2026-03-30_cognitive-bias-diagnostic-reasoning/cognitive-bias_slides_residents.pptx
+++ b/output/education/2026-03-30_cognitive-bias-diagnostic-reasoning/cognitive-bias_slides_residents.pptx
@@ -3136,6 +3136,7 @@
               </a:defRPr>
             </a:pPr>
             <a:r>
+              <a:rPr/>
               <a:t>認知バイアスが診断推論を歪める</a:t>
             </a:r>
           </a:p>
@@ -3172,6 +3173,7 @@
               </a:defRPr>
             </a:pPr>
             <a:r>
+              <a:rPr/>
               <a:t>— 行動経済学からの処方箋</a:t>
             </a:r>
           </a:p>
@@ -3216,7 +3218,9 @@
           <a:bodyPr rtlCol="0" anchor="ctr"/>
           <a:lstStyle/>
           <a:p>
-            <a:pPr algn="ctr"/>
+            <a:pPr algn="ctr">
+              <a:defRPr/>
+            </a:pPr>
           </a:p>
         </p:txBody>
       </p:sp>
@@ -3251,6 +3255,7 @@
               </a:defRPr>
             </a:pPr>
             <a:r>
+              <a:rPr/>
               <a:t>20分 | 研修医・専攻医向け | ガニェ事象1: 注意の獲得</a:t>
             </a:r>
           </a:p>
@@ -3295,7 +3300,9 @@
           <a:bodyPr rtlCol="0" anchor="ctr"/>
           <a:lstStyle/>
           <a:p>
-            <a:pPr algn="ctr"/>
+            <a:pPr algn="ctr">
+              <a:defRPr/>
+            </a:pPr>
           </a:p>
         </p:txBody>
       </p:sp>
@@ -3340,7 +3347,9 @@
           <a:bodyPr rtlCol="0" anchor="ctr"/>
           <a:lstStyle/>
           <a:p>
-            <a:pPr algn="ctr"/>
+            <a:pPr algn="ctr">
+              <a:defRPr/>
+            </a:pPr>
           </a:p>
         </p:txBody>
       </p:sp>
@@ -3375,10 +3384,12 @@
               </a:defRPr>
             </a:pPr>
             <a:r>
+              <a:rPr/>
               <a:t>「完全に確信がある」と答えた医師の</a:t>
             </a:r>
             <a:br/>
             <a:r>
+              <a:rPr/>
               <a:t>40%が間違っていた ——ICU剖検研究</a:t>
             </a:r>
           </a:p>
@@ -3415,10 +3426,12 @@
               </a:defRPr>
             </a:pPr>
             <a:r>
+              <a:rPr/>
               <a:t>これは能力の問題ではない。人間の脳に構造的に組み込まれた</a:t>
             </a:r>
             <a:br/>
             <a:r>
+              <a:rPr/>
               <a:t>「予測可能なシステムエラー」である。</a:t>
             </a:r>
           </a:p>
@@ -3458,7 +3471,7 @@
         </p:nvSpPr>
         <p:spPr>
           <a:xfrm>
-            <a:off x="457200" y="274320"/>
+            <a:off x="457200" y="384048"/>
             <a:ext cx="8229600" cy="457200"/>
           </a:xfrm>
           <a:prstGeom prst="rect">
@@ -3481,6 +3494,7 @@
               </a:defRPr>
             </a:pPr>
             <a:r>
+              <a:rPr/>
               <a:t>AI×バイアス + 持ち帰りの問い</a:t>
             </a:r>
           </a:p>
@@ -3525,7 +3539,9 @@
           <a:bodyPr rtlCol="0" anchor="ctr"/>
           <a:lstStyle/>
           <a:p>
-            <a:pPr algn="ctr"/>
+            <a:pPr algn="ctr">
+              <a:defRPr/>
+            </a:pPr>
           </a:p>
         </p:txBody>
       </p:sp>
@@ -3560,6 +3576,7 @@
               </a:defRPr>
             </a:pPr>
             <a:r>
+              <a:rPr/>
               <a:t>[ガニェ事象8-9: 評価＋保持と転移]</a:t>
             </a:r>
           </a:p>
@@ -3897,7 +3914,7 @@
         <p:spPr>
           <a:xfrm>
             <a:off x="457200" y="2743200"/>
-            <a:ext cx="8229600" cy="274320"/>
+            <a:ext cx="8229600" cy="340360"/>
           </a:xfrm>
           <a:prstGeom prst="rect">
             <a:avLst/>
@@ -3919,6 +3936,7 @@
               </a:defRPr>
             </a:pPr>
             <a:r>
+              <a:rPr/>
               <a:t>明日の診療で試してほしいこと:</a:t>
             </a:r>
           </a:p>
@@ -3955,6 +3973,7 @@
               </a:defRPr>
             </a:pPr>
             <a:r>
+              <a:rPr/>
               <a:t>  1. 診断タイムアウト: 1日1回「他に何があり得るか？」と自問する</a:t>
             </a:r>
           </a:p>
@@ -3991,6 +4010,7 @@
               </a:defRPr>
             </a:pPr>
             <a:r>
+              <a:rPr/>
               <a:t>  2. バイアス日誌: 今週1例、4つの問いで推論を振り返る</a:t>
             </a:r>
           </a:p>
@@ -4035,7 +4055,9 @@
           <a:bodyPr rtlCol="0" anchor="ctr"/>
           <a:lstStyle/>
           <a:p>
-            <a:pPr algn="ctr"/>
+            <a:pPr algn="ctr">
+              <a:defRPr/>
+            </a:pPr>
           </a:p>
         </p:txBody>
       </p:sp>
@@ -4080,7 +4102,9 @@
           <a:bodyPr rtlCol="0" anchor="ctr"/>
           <a:lstStyle/>
           <a:p>
-            <a:pPr algn="ctr"/>
+            <a:pPr algn="ctr">
+              <a:defRPr/>
+            </a:pPr>
           </a:p>
         </p:txBody>
       </p:sp>
@@ -4115,6 +4139,7 @@
               </a:defRPr>
             </a:pPr>
             <a:r>
+              <a:rPr/>
               <a:t>バイアスは個人の失敗ではない。認識することがメタ認知能力の高さを示す。</a:t>
             </a:r>
           </a:p>
@@ -4154,8 +4179,8 @@
         </p:nvSpPr>
         <p:spPr>
           <a:xfrm>
-            <a:off x="457200" y="274320"/>
-            <a:ext cx="8229600" cy="457200"/>
+            <a:off x="457200" y="384048"/>
+            <a:ext cx="8229600" cy="482600"/>
           </a:xfrm>
           <a:prstGeom prst="rect">
             <a:avLst/>
@@ -4177,6 +4202,7 @@
               </a:defRPr>
             </a:pPr>
             <a:r>
+              <a:rPr/>
               <a:t>学習目標</a:t>
             </a:r>
           </a:p>
@@ -4221,7 +4247,9 @@
           <a:bodyPr rtlCol="0" anchor="ctr"/>
           <a:lstStyle/>
           <a:p>
-            <a:pPr algn="ctr"/>
+            <a:pPr algn="ctr">
+              <a:defRPr/>
+            </a:pPr>
           </a:p>
         </p:txBody>
       </p:sp>
@@ -4256,6 +4284,7 @@
               </a:defRPr>
             </a:pPr>
             <a:r>
+              <a:rPr/>
               <a:t>[ガニェ事象2: 学習目標を知らせる]</a:t>
             </a:r>
           </a:p>
@@ -4300,7 +4329,9 @@
           <a:bodyPr rtlCol="0" anchor="ctr"/>
           <a:lstStyle/>
           <a:p>
-            <a:pPr algn="ctr"/>
+            <a:pPr algn="ctr">
+              <a:defRPr/>
+            </a:pPr>
           </a:p>
         </p:txBody>
       </p:sp>
@@ -4335,6 +4366,7 @@
               </a:defRPr>
             </a:pPr>
             <a:r>
+              <a:rPr/>
               <a:t>1</a:t>
             </a:r>
           </a:p>
@@ -4371,6 +4403,7 @@
               </a:defRPr>
             </a:pPr>
             <a:r>
+              <a:rPr/>
               <a:t>認識できる</a:t>
             </a:r>
           </a:p>
@@ -4407,10 +4440,12 @@
               </a:defRPr>
             </a:pPr>
             <a:r>
+              <a:rPr/>
               <a:t>4つの認知バイアス（確認・アンカリング・</a:t>
             </a:r>
             <a:br/>
             <a:r>
+              <a:rPr/>
               <a:t>利用可能性・過信）を臨床場面で見分けられる</a:t>
             </a:r>
           </a:p>
@@ -4455,7 +4490,9 @@
           <a:bodyPr rtlCol="0" anchor="ctr"/>
           <a:lstStyle/>
           <a:p>
-            <a:pPr algn="ctr"/>
+            <a:pPr algn="ctr">
+              <a:defRPr/>
+            </a:pPr>
           </a:p>
         </p:txBody>
       </p:sp>
@@ -4490,6 +4527,7 @@
               </a:defRPr>
             </a:pPr>
             <a:r>
+              <a:rPr/>
               <a:t>2</a:t>
             </a:r>
           </a:p>
@@ -4526,6 +4564,7 @@
               </a:defRPr>
             </a:pPr>
             <a:r>
+              <a:rPr/>
               <a:t>実践できる</a:t>
             </a:r>
           </a:p>
@@ -4562,10 +4601,12 @@
               </a:defRPr>
             </a:pPr>
             <a:r>
+              <a:rPr/>
               <a:t>除偏介入を3つ使える</a:t>
             </a:r>
             <a:br/>
             <a:r>
+              <a:rPr/>
               <a:t>（診断タイムアウト・プレモーテム・構造化振り返り）</a:t>
             </a:r>
           </a:p>
@@ -4610,7 +4651,9 @@
           <a:bodyPr rtlCol="0" anchor="ctr"/>
           <a:lstStyle/>
           <a:p>
-            <a:pPr algn="ctr"/>
+            <a:pPr algn="ctr">
+              <a:defRPr/>
+            </a:pPr>
           </a:p>
         </p:txBody>
       </p:sp>
@@ -4645,6 +4688,7 @@
               </a:defRPr>
             </a:pPr>
             <a:r>
+              <a:rPr/>
               <a:t>3</a:t>
             </a:r>
           </a:p>
@@ -4681,6 +4725,7 @@
               </a:defRPr>
             </a:pPr>
             <a:r>
+              <a:rPr/>
               <a:t>振り返れる</a:t>
             </a:r>
           </a:p>
@@ -4717,10 +4762,12 @@
               </a:defRPr>
             </a:pPr>
             <a:r>
+              <a:rPr/>
               <a:t>自分の推論プロセスを</a:t>
             </a:r>
             <a:br/>
             <a:r>
+              <a:rPr/>
               <a:t>構造化して省察できる</a:t>
             </a:r>
           </a:p>
@@ -4760,7 +4807,7 @@
         </p:nvSpPr>
         <p:spPr>
           <a:xfrm>
-            <a:off x="457200" y="274320"/>
+            <a:off x="457200" y="384048"/>
             <a:ext cx="8229600" cy="457200"/>
           </a:xfrm>
           <a:prstGeom prst="rect">
@@ -4783,6 +4830,7 @@
               </a:defRPr>
             </a:pPr>
             <a:r>
+              <a:rPr/>
               <a:t>二重過程理論 — System 1とSystem 2</a:t>
             </a:r>
           </a:p>
@@ -4827,7 +4875,9 @@
           <a:bodyPr rtlCol="0" anchor="ctr"/>
           <a:lstStyle/>
           <a:p>
-            <a:pPr algn="ctr"/>
+            <a:pPr algn="ctr">
+              <a:defRPr/>
+            </a:pPr>
           </a:p>
         </p:txBody>
       </p:sp>
@@ -4862,6 +4912,7 @@
               </a:defRPr>
             </a:pPr>
             <a:r>
+              <a:rPr/>
               <a:t>[ガニェ事象3: 前提条件を思い出させる]</a:t>
             </a:r>
           </a:p>
@@ -4908,7 +4959,9 @@
           <a:bodyPr rtlCol="0" anchor="ctr"/>
           <a:lstStyle/>
           <a:p>
-            <a:pPr algn="ctr"/>
+            <a:pPr algn="ctr">
+              <a:defRPr/>
+            </a:pPr>
           </a:p>
         </p:txBody>
       </p:sp>
@@ -4943,6 +4996,7 @@
               </a:defRPr>
             </a:pPr>
             <a:r>
+              <a:rPr/>
               <a:t>System 1（直感）</a:t>
             </a:r>
           </a:p>
@@ -4979,18 +5033,22 @@
               </a:defRPr>
             </a:pPr>
             <a:r>
+              <a:rPr/>
               <a:t>高速・自動的・省エネ</a:t>
             </a:r>
             <a:br/>
             <a:r>
+              <a:rPr/>
               <a:t>パターン認識で即座に診断仮説を生成</a:t>
             </a:r>
             <a:br/>
             <a:r>
+              <a:rPr/>
               <a:t>強み: 経験に基づく効率的判断</a:t>
             </a:r>
             <a:br/>
             <a:r>
+              <a:rPr/>
               <a:t>弱み: 認知バイアスの温床</a:t>
             </a:r>
           </a:p>
@@ -5037,7 +5095,9 @@
           <a:bodyPr rtlCol="0" anchor="ctr"/>
           <a:lstStyle/>
           <a:p>
-            <a:pPr algn="ctr"/>
+            <a:pPr algn="ctr">
+              <a:defRPr/>
+            </a:pPr>
           </a:p>
         </p:txBody>
       </p:sp>
@@ -5072,6 +5132,7 @@
               </a:defRPr>
             </a:pPr>
             <a:r>
+              <a:rPr/>
               <a:t>System 2（分析）</a:t>
             </a:r>
           </a:p>
@@ -5108,18 +5169,22 @@
               </a:defRPr>
             </a:pPr>
             <a:r>
+              <a:rPr/>
               <a:t>低速・意識的・高負荷</a:t>
             </a:r>
             <a:br/>
             <a:r>
+              <a:rPr/>
               <a:t>鑑別診断リストの体系的検討</a:t>
             </a:r>
             <a:br/>
             <a:r>
+              <a:rPr/>
               <a:t>強み: 論理的・確率的推論</a:t>
             </a:r>
             <a:br/>
             <a:r>
+              <a:rPr/>
               <a:t>弱み: 疲労で機能低下</a:t>
             </a:r>
           </a:p>
@@ -5156,6 +5221,7 @@
               </a:defRPr>
             </a:pPr>
             <a:r>
+              <a:rPr/>
               <a:t>2,500以上の論文がこのモデルを医療に適用</a:t>
             </a:r>
           </a:p>
@@ -5200,7 +5266,9 @@
           <a:bodyPr rtlCol="0" anchor="ctr"/>
           <a:lstStyle/>
           <a:p>
-            <a:pPr algn="ctr"/>
+            <a:pPr algn="ctr">
+              <a:defRPr/>
+            </a:pPr>
           </a:p>
         </p:txBody>
       </p:sp>
@@ -5245,7 +5313,9 @@
           <a:bodyPr rtlCol="0" anchor="ctr"/>
           <a:lstStyle/>
           <a:p>
-            <a:pPr algn="ctr"/>
+            <a:pPr algn="ctr">
+              <a:defRPr/>
+            </a:pPr>
           </a:p>
         </p:txBody>
       </p:sp>
@@ -5280,6 +5350,7 @@
               </a:defRPr>
             </a:pPr>
             <a:r>
+              <a:rPr/>
               <a:t>Enke (2023): 命がかかっている場面でもバイアスは縮小するが完全には消えない</a:t>
             </a:r>
           </a:p>
@@ -5319,7 +5390,7 @@
         </p:nvSpPr>
         <p:spPr>
           <a:xfrm>
-            <a:off x="457200" y="274320"/>
+            <a:off x="457200" y="384048"/>
             <a:ext cx="8229600" cy="457200"/>
           </a:xfrm>
           <a:prstGeom prst="rect">
@@ -5342,6 +5413,7 @@
               </a:defRPr>
             </a:pPr>
             <a:r>
+              <a:rPr/>
               <a:t>確認バイアス — 自分の仮説を裏づける情報ばかり集める</a:t>
             </a:r>
           </a:p>
@@ -5386,7 +5458,9 @@
           <a:bodyPr rtlCol="0" anchor="ctr"/>
           <a:lstStyle/>
           <a:p>
-            <a:pPr algn="ctr"/>
+            <a:pPr algn="ctr">
+              <a:defRPr/>
+            </a:pPr>
           </a:p>
         </p:txBody>
       </p:sp>
@@ -5421,6 +5495,7 @@
               </a:defRPr>
             </a:pPr>
             <a:r>
+              <a:rPr/>
               <a:t>[ガニェ事象4: 新しい内容を提示する]</a:t>
             </a:r>
           </a:p>
@@ -5465,7 +5540,9 @@
           <a:bodyPr rtlCol="0" anchor="ctr"/>
           <a:lstStyle/>
           <a:p>
-            <a:pPr algn="ctr"/>
+            <a:pPr algn="ctr">
+              <a:defRPr/>
+            </a:pPr>
           </a:p>
         </p:txBody>
       </p:sp>
@@ -5500,6 +5577,7 @@
               </a:defRPr>
             </a:pPr>
             <a:r>
+              <a:rPr/>
               <a:t>臨床ケース: 不安障害既往の胸痛</a:t>
             </a:r>
           </a:p>
@@ -5513,8 +5591,8 @@
         </p:nvSpPr>
         <p:spPr>
           <a:xfrm>
-            <a:off x="640080" y="1554480"/>
-            <a:ext cx="7863840" cy="274320"/>
+            <a:off x="640080" y="1572768"/>
+            <a:ext cx="7863840" cy="304799"/>
           </a:xfrm>
           <a:prstGeom prst="rect">
             <a:avLst/>
@@ -5536,6 +5614,7 @@
               </a:defRPr>
             </a:pPr>
             <a:r>
+              <a:rPr/>
               <a:t>32歳女性。不安障害の既往あり。胸痛を主訴に来院。</a:t>
             </a:r>
           </a:p>
@@ -5572,6 +5651,7 @@
               </a:defRPr>
             </a:pPr>
             <a:r>
+              <a:rPr/>
               <a:t>  1. バイアス発動: 「不安障害の既往」→ System 1が「パニック発作」を生成</a:t>
             </a:r>
           </a:p>
@@ -5608,6 +5688,7 @@
               </a:defRPr>
             </a:pPr>
             <a:r>
+              <a:rPr/>
               <a:t>  2. 確認的情報収集: 「ストレスは？」「動悸は？」— 支持する質問が優先</a:t>
             </a:r>
           </a:p>
@@ -5644,6 +5725,7 @@
               </a:defRPr>
             </a:pPr>
             <a:r>
+              <a:rPr/>
               <a:t>  3. 矛盾情報の軽視: 軽度の頻脈、SpO2 96%を「不安による」と解釈</a:t>
             </a:r>
           </a:p>
@@ -5680,6 +5762,7 @@
               </a:defRPr>
             </a:pPr>
             <a:r>
+              <a:rPr/>
               <a:t>  4. 結果: 肺塞栓症の見逃し</a:t>
             </a:r>
           </a:p>
@@ -5694,7 +5777,7 @@
         <p:spPr>
           <a:xfrm>
             <a:off x="640080" y="3474720"/>
-            <a:ext cx="7863840" cy="274320"/>
+            <a:ext cx="7863840" cy="287020"/>
           </a:xfrm>
           <a:prstGeom prst="rect">
             <a:avLst/>
@@ -5716,6 +5799,7 @@
               </a:defRPr>
             </a:pPr>
             <a:r>
+              <a:rPr/>
               <a:t>エラーの構造: 既往歴がアンカーとなり、確認バイアスが強化する複合パターン</a:t>
             </a:r>
           </a:p>
@@ -5755,7 +5839,7 @@
         </p:nvSpPr>
         <p:spPr>
           <a:xfrm>
-            <a:off x="457200" y="274320"/>
+            <a:off x="457200" y="384048"/>
             <a:ext cx="8229600" cy="457200"/>
           </a:xfrm>
           <a:prstGeom prst="rect">
@@ -5778,6 +5862,7 @@
               </a:defRPr>
             </a:pPr>
             <a:r>
+              <a:rPr/>
               <a:t>アンカリング — 最初の情報に引きずられる</a:t>
             </a:r>
           </a:p>
@@ -5822,7 +5907,9 @@
           <a:bodyPr rtlCol="0" anchor="ctr"/>
           <a:lstStyle/>
           <a:p>
-            <a:pPr algn="ctr"/>
+            <a:pPr algn="ctr">
+              <a:defRPr/>
+            </a:pPr>
           </a:p>
         </p:txBody>
       </p:sp>
@@ -5857,6 +5944,7 @@
               </a:defRPr>
             </a:pPr>
             <a:r>
+              <a:rPr/>
               <a:t>[ガニェ事象4: 新しい内容を提示する（続き）]</a:t>
             </a:r>
           </a:p>
@@ -5903,7 +5991,9 @@
           <a:bodyPr rtlCol="0" anchor="ctr"/>
           <a:lstStyle/>
           <a:p>
-            <a:pPr algn="ctr"/>
+            <a:pPr algn="ctr">
+              <a:defRPr/>
+            </a:pPr>
           </a:p>
         </p:txBody>
       </p:sp>
@@ -5938,6 +6028,7 @@
               </a:defRPr>
             </a:pPr>
             <a:r>
+              <a:rPr/>
               <a:t>臨床ケース: 紹介状バイアス</a:t>
             </a:r>
           </a:p>
@@ -5951,8 +6042,8 @@
         </p:nvSpPr>
         <p:spPr>
           <a:xfrm>
-            <a:off x="640080" y="1554480"/>
-            <a:ext cx="7863840" cy="274320"/>
+            <a:off x="640080" y="1572768"/>
+            <a:ext cx="7863840" cy="304799"/>
           </a:xfrm>
           <a:prstGeom prst="rect">
             <a:avLst/>
@@ -5974,6 +6065,7 @@
               </a:defRPr>
             </a:pPr>
             <a:r>
+              <a:rPr/>
               <a:t>58歳男性。紹介状に「逆流性食道炎の増悪疑い」と記載。</a:t>
             </a:r>
           </a:p>
@@ -6010,6 +6102,7 @@
               </a:defRPr>
             </a:pPr>
             <a:r>
+              <a:rPr/>
               <a:t>  1. アンカー設定: 紹介状の診断名がSystem 1に即座に取り込まれる</a:t>
             </a:r>
           </a:p>
@@ -6046,6 +6139,7 @@
               </a:defRPr>
             </a:pPr>
             <a:r>
+              <a:rPr/>
               <a:t>  2. 不十分な調整: 労作時増悪、冷汗 — GERDに一致しない点に注意が向きにくい</a:t>
             </a:r>
           </a:p>
@@ -6082,6 +6176,7 @@
               </a:defRPr>
             </a:pPr>
             <a:r>
+              <a:rPr/>
               <a:t>  3. 結果: 急性冠症候群の診断遅延</a:t>
             </a:r>
           </a:p>
@@ -6096,7 +6191,7 @@
         <p:spPr>
           <a:xfrm>
             <a:off x="640080" y="3200400"/>
-            <a:ext cx="7863840" cy="274320"/>
+            <a:ext cx="7863840" cy="287020"/>
           </a:xfrm>
           <a:prstGeom prst="rect">
             <a:avLst/>
@@ -6118,6 +6213,7 @@
               </a:defRPr>
             </a:pPr>
             <a:r>
+              <a:rPr/>
               <a:t>「権威ある情報源」がアンカーの強度を増幅</a:t>
             </a:r>
           </a:p>
@@ -6154,6 +6250,7 @@
               </a:defRPr>
             </a:pPr>
             <a:r>
+              <a:rPr/>
               <a:t>年間約27,000件の入院と150,000件以上の患者被害が診断エラーに起因</a:t>
             </a:r>
           </a:p>
@@ -6193,7 +6290,7 @@
         </p:nvSpPr>
         <p:spPr>
           <a:xfrm>
-            <a:off x="457200" y="274320"/>
+            <a:off x="457200" y="384048"/>
             <a:ext cx="8229600" cy="457200"/>
           </a:xfrm>
           <a:prstGeom prst="rect">
@@ -6216,6 +6313,7 @@
               </a:defRPr>
             </a:pPr>
             <a:r>
+              <a:rPr/>
               <a:t>利用可能性ヒューリスティック — 思い出しやすい＝よくある？</a:t>
             </a:r>
           </a:p>
@@ -6260,7 +6358,9 @@
           <a:bodyPr rtlCol="0" anchor="ctr"/>
           <a:lstStyle/>
           <a:p>
-            <a:pPr algn="ctr"/>
+            <a:pPr algn="ctr">
+              <a:defRPr/>
+            </a:pPr>
           </a:p>
         </p:txBody>
       </p:sp>
@@ -6295,6 +6395,7 @@
               </a:defRPr>
             </a:pPr>
             <a:r>
+              <a:rPr/>
               <a:t>[ガニェ事象4: 新しい内容を提示する（続き）]</a:t>
             </a:r>
           </a:p>
@@ -6339,7 +6440,9 @@
           <a:bodyPr rtlCol="0" anchor="ctr"/>
           <a:lstStyle/>
           <a:p>
-            <a:pPr algn="ctr"/>
+            <a:pPr algn="ctr">
+              <a:defRPr/>
+            </a:pPr>
           </a:p>
         </p:txBody>
       </p:sp>
@@ -6374,6 +6477,7 @@
               </a:defRPr>
             </a:pPr>
             <a:r>
+              <a:rPr/>
               <a:t>臨床ケース: 直近の経験が判断を歪める</a:t>
             </a:r>
           </a:p>
@@ -6387,8 +6491,8 @@
         </p:nvSpPr>
         <p:spPr>
           <a:xfrm>
-            <a:off x="640080" y="1554480"/>
-            <a:ext cx="7863840" cy="274320"/>
+            <a:off x="640080" y="1572768"/>
+            <a:ext cx="7863840" cy="304799"/>
           </a:xfrm>
           <a:prstGeom prst="rect">
             <a:avLst/>
@@ -6410,6 +6514,7 @@
               </a:defRPr>
             </a:pPr>
             <a:r>
+              <a:rPr/>
               <a:t>先週、肺炎を見逃して急変させた研修医が翌週の外来で——</a:t>
             </a:r>
           </a:p>
@@ -6446,6 +6551,7 @@
               </a:defRPr>
             </a:pPr>
             <a:r>
+              <a:rPr/>
               <a:t>  1. 利用可能性の増大: 「肺炎を見逃した」記憶が鮮烈に残る</a:t>
             </a:r>
           </a:p>
@@ -6482,6 +6588,7 @@
               </a:defRPr>
             </a:pPr>
             <a:r>
+              <a:rPr/>
               <a:t>  2. 確率推定の歪み: 咳嗽・発熱の患者で肺炎の事前確率を過大評価</a:t>
             </a:r>
           </a:p>
@@ -6518,6 +6625,7 @@
               </a:defRPr>
             </a:pPr>
             <a:r>
+              <a:rPr/>
               <a:t>  3. 過剰検査: 臨床的に不要なCTオーダーの増加</a:t>
             </a:r>
           </a:p>
@@ -6554,6 +6662,7 @@
               </a:defRPr>
             </a:pPr>
             <a:r>
+              <a:rPr/>
               <a:t>  4. 逆方向のリスク: 肺炎に注意が集中し、心不全や喘息発作を見落とす</a:t>
             </a:r>
           </a:p>
@@ -6590,6 +6699,7 @@
               </a:defRPr>
             </a:pPr>
             <a:r>
+              <a:rPr/>
               <a:t>1,015名調査: 利用可能性ヒューリスティックが診断推論に系統的影響を実証</a:t>
             </a:r>
           </a:p>
@@ -6629,7 +6739,7 @@
         </p:nvSpPr>
         <p:spPr>
           <a:xfrm>
-            <a:off x="457200" y="274320"/>
+            <a:off x="457200" y="384048"/>
             <a:ext cx="8229600" cy="457200"/>
           </a:xfrm>
           <a:prstGeom prst="rect">
@@ -6652,6 +6762,7 @@
               </a:defRPr>
             </a:pPr>
             <a:r>
+              <a:rPr/>
               <a:t>過信 — 自分の判断を過大評価する</a:t>
             </a:r>
           </a:p>
@@ -6696,7 +6807,9 @@
           <a:bodyPr rtlCol="0" anchor="ctr"/>
           <a:lstStyle/>
           <a:p>
-            <a:pPr algn="ctr"/>
+            <a:pPr algn="ctr">
+              <a:defRPr/>
+            </a:pPr>
           </a:p>
         </p:txBody>
       </p:sp>
@@ -6731,6 +6844,7 @@
               </a:defRPr>
             </a:pPr>
             <a:r>
+              <a:rPr/>
               <a:t>[ガニェ事象4: 新しい内容を提示する（続き）]</a:t>
             </a:r>
           </a:p>
@@ -6777,7 +6891,9 @@
           <a:bodyPr rtlCol="0" anchor="ctr"/>
           <a:lstStyle/>
           <a:p>
-            <a:pPr algn="ctr"/>
+            <a:pPr algn="ctr">
+              <a:defRPr/>
+            </a:pPr>
           </a:p>
         </p:txBody>
       </p:sp>
@@ -6812,6 +6928,7 @@
               </a:defRPr>
             </a:pPr>
             <a:r>
+              <a:rPr/>
               <a:t>過精度</a:t>
             </a:r>
           </a:p>
@@ -6825,7 +6942,7 @@
         </p:nvSpPr>
         <p:spPr>
           <a:xfrm>
-            <a:off x="548640" y="1554480"/>
+            <a:off x="548640" y="1572768"/>
             <a:ext cx="2560320" cy="640080"/>
           </a:xfrm>
           <a:prstGeom prst="rect">
@@ -6848,10 +6965,12 @@
               </a:defRPr>
             </a:pPr>
             <a:r>
+              <a:rPr/>
               <a:t>信頼区間が狭すぎる</a:t>
             </a:r>
             <a:br/>
             <a:r>
+              <a:rPr/>
               <a:t>「90%確実」が実際は60%</a:t>
             </a:r>
           </a:p>
@@ -6898,7 +7017,9 @@
           <a:bodyPr rtlCol="0" anchor="ctr"/>
           <a:lstStyle/>
           <a:p>
-            <a:pPr algn="ctr"/>
+            <a:pPr algn="ctr">
+              <a:defRPr/>
+            </a:pPr>
           </a:p>
         </p:txBody>
       </p:sp>
@@ -6933,6 +7054,7 @@
               </a:defRPr>
             </a:pPr>
             <a:r>
+              <a:rPr/>
               <a:t>過大評価</a:t>
             </a:r>
           </a:p>
@@ -6946,7 +7068,7 @@
         </p:nvSpPr>
         <p:spPr>
           <a:xfrm>
-            <a:off x="3474720" y="1554480"/>
+            <a:off x="3474720" y="1572768"/>
             <a:ext cx="2560320" cy="640080"/>
           </a:xfrm>
           <a:prstGeom prst="rect">
@@ -6969,10 +7091,12 @@
               </a:defRPr>
             </a:pPr>
             <a:r>
+              <a:rPr/>
               <a:t>自分の能力を</a:t>
             </a:r>
             <a:br/>
             <a:r>
+              <a:rPr/>
               <a:t>実際以上に見積もる</a:t>
             </a:r>
           </a:p>
@@ -7019,7 +7143,9 @@
           <a:bodyPr rtlCol="0" anchor="ctr"/>
           <a:lstStyle/>
           <a:p>
-            <a:pPr algn="ctr"/>
+            <a:pPr algn="ctr">
+              <a:defRPr/>
+            </a:pPr>
           </a:p>
         </p:txBody>
       </p:sp>
@@ -7054,6 +7180,7 @@
               </a:defRPr>
             </a:pPr>
             <a:r>
+              <a:rPr/>
               <a:t>過配置</a:t>
             </a:r>
           </a:p>
@@ -7067,7 +7194,7 @@
         </p:nvSpPr>
         <p:spPr>
           <a:xfrm>
-            <a:off x="6400800" y="1554480"/>
+            <a:off x="6400800" y="1572768"/>
             <a:ext cx="2560320" cy="640080"/>
           </a:xfrm>
           <a:prstGeom prst="rect">
@@ -7090,10 +7217,12 @@
               </a:defRPr>
             </a:pPr>
             <a:r>
+              <a:rPr/>
               <a:t>自分が平均以上</a:t>
             </a:r>
             <a:br/>
             <a:r>
+              <a:rPr/>
               <a:t>だと信じる</a:t>
             </a:r>
           </a:p>
@@ -7528,7 +7657,7 @@
         <p:spPr>
           <a:xfrm>
             <a:off x="457200" y="4114800"/>
-            <a:ext cx="8229600" cy="274320"/>
+            <a:ext cx="8229600" cy="287020"/>
           </a:xfrm>
           <a:prstGeom prst="rect">
             <a:avLst/>
@@ -7550,6 +7679,7 @@
               </a:defRPr>
             </a:pPr>
             <a:r>
+              <a:rPr/>
               <a:t>逆転現象: レジデントは指導医より自信が高いのに正確性は低い</a:t>
             </a:r>
           </a:p>
@@ -7589,7 +7719,7 @@
         </p:nvSpPr>
         <p:spPr>
           <a:xfrm>
-            <a:off x="457200" y="274320"/>
+            <a:off x="457200" y="384048"/>
             <a:ext cx="8229600" cy="457200"/>
           </a:xfrm>
           <a:prstGeom prst="rect">
@@ -7612,6 +7742,7 @@
               </a:defRPr>
             </a:pPr>
             <a:r>
+              <a:rPr/>
               <a:t>除偏介入の実践 — あなたの脳を守る3つの武器</a:t>
             </a:r>
           </a:p>
@@ -7656,7 +7787,9 @@
           <a:bodyPr rtlCol="0" anchor="ctr"/>
           <a:lstStyle/>
           <a:p>
-            <a:pPr algn="ctr"/>
+            <a:pPr algn="ctr">
+              <a:defRPr/>
+            </a:pPr>
           </a:p>
         </p:txBody>
       </p:sp>
@@ -7691,6 +7824,7 @@
               </a:defRPr>
             </a:pPr>
             <a:r>
+              <a:rPr/>
               <a:t>[ガニェ事象5-6: 学習の指針＋練習の機会]</a:t>
             </a:r>
           </a:p>
@@ -7735,7 +7869,9 @@
           <a:bodyPr rtlCol="0" anchor="ctr"/>
           <a:lstStyle/>
           <a:p>
-            <a:pPr algn="ctr"/>
+            <a:pPr algn="ctr">
+              <a:defRPr/>
+            </a:pPr>
           </a:p>
         </p:txBody>
       </p:sp>
@@ -7770,6 +7906,7 @@
               </a:defRPr>
             </a:pPr>
             <a:r>
+              <a:rPr/>
               <a:t>1. 診断タイムアウト</a:t>
             </a:r>
           </a:p>
@@ -7806,14 +7943,17 @@
               </a:defRPr>
             </a:pPr>
             <a:r>
+              <a:rPr/>
               <a:t>意図的に立ち止まり</a:t>
             </a:r>
             <a:br/>
             <a:r>
+              <a:rPr/>
               <a:t>「他に何があり得るか？」と自問</a:t>
             </a:r>
             <a:br/>
             <a:r>
+              <a:rPr/>
               <a:t>Croskerry (2003) 認知的強制戦略</a:t>
             </a:r>
           </a:p>
@@ -7858,7 +7998,9 @@
           <a:bodyPr rtlCol="0" anchor="ctr"/>
           <a:lstStyle/>
           <a:p>
-            <a:pPr algn="ctr"/>
+            <a:pPr algn="ctr">
+              <a:defRPr/>
+            </a:pPr>
           </a:p>
         </p:txBody>
       </p:sp>
@@ -7893,6 +8035,7 @@
               </a:defRPr>
             </a:pPr>
             <a:r>
+              <a:rPr/>
               <a:t>2. プレモーテム分析</a:t>
             </a:r>
           </a:p>
@@ -7929,14 +8072,17 @@
               </a:defRPr>
             </a:pPr>
             <a:r>
+              <a:rPr/>
               <a:t>「もしこの診断が間違っていたら</a:t>
             </a:r>
             <a:br/>
             <a:r>
+              <a:rPr/>
               <a:t>最も可能性の高い理由は？」</a:t>
             </a:r>
             <a:br/>
             <a:r>
+              <a:rPr/>
               <a:t>Gary Klein提唱</a:t>
             </a:r>
           </a:p>
@@ -7981,7 +8127,9 @@
           <a:bodyPr rtlCol="0" anchor="ctr"/>
           <a:lstStyle/>
           <a:p>
-            <a:pPr algn="ctr"/>
+            <a:pPr algn="ctr">
+              <a:defRPr/>
+            </a:pPr>
           </a:p>
         </p:txBody>
       </p:sp>
@@ -8016,6 +8164,7 @@
               </a:defRPr>
             </a:pPr>
             <a:r>
+              <a:rPr/>
               <a:t>3. 構造化振り返り</a:t>
             </a:r>
           </a:p>
@@ -8052,14 +8201,17 @@
               </a:defRPr>
             </a:pPr>
             <a:r>
+              <a:rPr/>
               <a:t>自分の推論プロセスを検討する</a:t>
             </a:r>
             <a:br/>
             <a:r>
+              <a:rPr/>
               <a:t>「認知的剖検（Cognitive Autopsy）」</a:t>
             </a:r>
             <a:br/>
             <a:r>
+              <a:rPr/>
               <a:t>唯一成功が確認された介入</a:t>
             </a:r>
           </a:p>
@@ -8073,7 +8225,7 @@
         </p:nvSpPr>
         <p:spPr>
           <a:xfrm>
-            <a:off x="457200" y="4114800"/>
+            <a:off x="457200" y="4224527"/>
             <a:ext cx="8229600" cy="274320"/>
           </a:xfrm>
           <a:prstGeom prst="rect">
@@ -8096,6 +8248,7 @@
               </a:defRPr>
             </a:pPr>
             <a:r>
+              <a:rPr/>
               <a:t>テクノロジー介入87.9%成功 vs 認知的戦略50.0% (Ludolph &amp; Schulz 2018)</a:t>
             </a:r>
           </a:p>
@@ -8135,7 +8288,7 @@
         </p:nvSpPr>
         <p:spPr>
           <a:xfrm>
-            <a:off x="457200" y="274320"/>
+            <a:off x="457200" y="384048"/>
             <a:ext cx="8229600" cy="457200"/>
           </a:xfrm>
           <a:prstGeom prst="rect">
@@ -8158,6 +8311,7 @@
               </a:defRPr>
             </a:pPr>
             <a:r>
+              <a:rPr/>
               <a:t>ペアワーク — 構造化振り返りをやってみよう（5分）</a:t>
             </a:r>
           </a:p>
@@ -8202,7 +8356,9 @@
           <a:bodyPr rtlCol="0" anchor="ctr"/>
           <a:lstStyle/>
           <a:p>
-            <a:pPr algn="ctr"/>
+            <a:pPr algn="ctr">
+              <a:defRPr/>
+            </a:pPr>
           </a:p>
         </p:txBody>
       </p:sp>
@@ -8237,6 +8393,7 @@
               </a:defRPr>
             </a:pPr>
             <a:r>
+              <a:rPr/>
               <a:t>[ガニェ事象7: フィードバックを提供する]</a:t>
             </a:r>
           </a:p>
@@ -8273,6 +8430,7 @@
               </a:defRPr>
             </a:pPr>
             <a:r>
+              <a:rPr/>
               <a:t>最近の診療で診断に迷った症例を1つ思い出し、以下の4つの問いに答える:</a:t>
             </a:r>
           </a:p>
@@ -8714,7 +8872,9 @@
           <a:bodyPr rtlCol="0" anchor="ctr"/>
           <a:lstStyle/>
           <a:p>
-            <a:pPr algn="ctr"/>
+            <a:pPr algn="ctr">
+              <a:defRPr/>
+            </a:pPr>
           </a:p>
         </p:txBody>
       </p:sp>
@@ -8759,7 +8919,9 @@
           <a:bodyPr rtlCol="0" anchor="ctr"/>
           <a:lstStyle/>
           <a:p>
-            <a:pPr algn="ctr"/>
+            <a:pPr algn="ctr">
+              <a:defRPr/>
+            </a:pPr>
           </a:p>
         </p:txBody>
       </p:sp>
@@ -8794,10 +8956,12 @@
               </a:defRPr>
             </a:pPr>
             <a:r>
+              <a:rPr/>
               <a:t>パートナーに「もしその診断が間違っていたら？」</a:t>
             </a:r>
             <a:br/>
             <a:r>
+              <a:rPr/>
               <a:t>と聞いてもらう（プレモーテム分析の実践）</a:t>
             </a:r>
           </a:p>

--- a/output/education/2026-03-30_cognitive-bias-diagnostic-reasoning/cognitive-bias_slides_residents.pptx
+++ b/output/education/2026-03-30_cognitive-bias-diagnostic-reasoning/cognitive-bias_slides_residents.pptx
@@ -8225,7 +8225,7 @@
         </p:nvSpPr>
         <p:spPr>
           <a:xfrm>
-            <a:off x="457200" y="4224527"/>
+            <a:off x="457200" y="4361688"/>
             <a:ext cx="8229600" cy="274320"/>
           </a:xfrm>
           <a:prstGeom prst="rect">
